--- a/lecons/USA/Environment and Development/09_USA_ENV_L09_New_Industrial_Strategy_for_Development.pptx
+++ b/lecons/USA/Environment and Development/09_USA_ENV_L09_New_Industrial_Strategy_for_Development.pptx
@@ -13291,7 +13291,7 @@
               <a:buNone/>
             </a:pPr>
             <a:r>
-              <a:rPr lang="en-US" sz="4000" b="1" dirty="0">
+              <a:rPr lang="en-US" sz="3200" b="1" dirty="0">
                 <a:solidFill>
                   <a:srgbClr val="111111"/>
                 </a:solidFill>
@@ -13301,7 +13301,7 @@
               </a:rPr>
               <a:t>Topic: Current Development Issues</a:t>
             </a:r>
-            <a:endParaRPr lang="en-US" sz="4000" dirty="0"/>
+            <a:endParaRPr lang="en-US" sz="3200" dirty="0"/>
           </a:p>
           <a:p>
             <a:pPr algn="l" indent="0" marL="0">
@@ -13311,7 +13311,7 @@
               <a:buNone/>
             </a:pPr>
             <a:r>
-              <a:rPr lang="en-US" sz="4000" b="1" dirty="0">
+              <a:rPr lang="en-US" sz="3200" b="1" dirty="0">
                 <a:solidFill>
                   <a:srgbClr val="111111"/>
                 </a:solidFill>
@@ -13321,7 +13321,7 @@
               </a:rPr>
               <a:t>Sub-topic: Global Strategies to Redress Underdevelopment</a:t>
             </a:r>
-            <a:endParaRPr lang="en-US" sz="4000" dirty="0"/>
+            <a:endParaRPr lang="en-US" sz="3200" dirty="0"/>
           </a:p>
           <a:p>
             <a:pPr algn="l" indent="0" marL="0">
@@ -13331,7 +13331,7 @@
               <a:buNone/>
             </a:pPr>
             <a:r>
-              <a:rPr lang="en-US" sz="4000" b="1" dirty="0">
+              <a:rPr lang="en-US" sz="3200" b="1" dirty="0">
                 <a:solidFill>
                   <a:srgbClr val="990011"/>
                 </a:solidFill>
@@ -13341,7 +13341,7 @@
               </a:rPr>
               <a:t>Lesson 9: New Industrial Strategy for Development</a:t>
             </a:r>
-            <a:endParaRPr lang="en-US" sz="4000" dirty="0"/>
+            <a:endParaRPr lang="en-US" sz="3200" dirty="0"/>
           </a:p>
         </p:txBody>
       </p:sp>
